--- a/public/fun/pack/pptx/newspro/카드뉴스프리미엄_15_오늘의한마디_에메랄드브라스.pptx
+++ b/public/fun/pack/pptx/newspro/카드뉴스프리미엄_15_오늘의한마디_에메랄드브라스.pptx
@@ -113,12 +113,12 @@
   <p:extLst>
     <p:ext uri="{521415D9-36F7-43E2-AB2F-B90AF26B5E84}">
       <p14:sectionLst xmlns:p14="http://schemas.microsoft.com/office/powerpoint/2010/main">
-        <p14:section name="시작" id="{5D07C264-7DE1-465C-8914-0E57B972A789}">
+        <p14:section name="시작" id="{0BD4205E-F0B2-41C5-A0A7-12DFCD98C061}">
           <p14:sldIdLst>
             <p14:sldId id="256"/>
           </p14:sldIdLst>
         </p14:section>
-        <p14:section name="본문" id="{547212A0-7781-4FD0-A243-25F8AB77B0AC}">
+        <p14:section name="본문" id="{70E43DF5-068C-4DDB-A64A-0DFC9128FC64}">
           <p14:sldIdLst>
             <p14:sldId id="257"/>
             <p14:sldId id="258"/>
@@ -127,7 +127,7 @@
             <p14:sldId id="261"/>
           </p14:sldIdLst>
         </p14:section>
-        <p14:section name="마무리" id="{FBC29A5C-7932-4FC9-905D-D2B94D9D723F}">
+        <p14:section name="마무리" id="{35177F43-9C5F-44D6-A3CB-0683E5F64E36}">
           <p14:sldIdLst>
             <p14:sldId id="262"/>
           </p14:sldIdLst>
@@ -1507,7 +1507,7 @@
             </a:lvl1pPr>
           </a:lstStyle>
           <a:p>
-            <a:fld id="{A0B68AB4-F109-4446-B451-502A123B97F1}" type="slidenum">
+            <a:fld id="{4EECF695-5DCE-45B4-A18C-6370DFE9D7AF}" type="slidenum">
               <a:rPr lang="en-US"/>
               <a:t>‹#›</a:t>
             </a:fld>
@@ -2164,7 +2164,7 @@
             </a:lvl1pPr>
           </a:lstStyle>
           <a:p>
-            <a:fld id="{485151ED-F37D-4F5E-9E60-842C131C5FF3}" type="slidenum">
+            <a:fld id="{FE7B6BEF-7267-4938-B16B-ACE8EBB2FB78}" type="slidenum">
               <a:rPr lang="en-US"/>
               <a:t>‹#›</a:t>
             </a:fld>
@@ -2853,7 +2853,7 @@
             </a:lvl1pPr>
           </a:lstStyle>
           <a:p>
-            <a:fld id="{DD3E3C7A-E84B-4C89-BC10-D86F758EAD16}" type="slidenum">
+            <a:fld id="{527EB419-2E0F-4DDF-8CAC-D48ED7A1E006}" type="slidenum">
               <a:rPr lang="en-US"/>
               <a:t>‹#›</a:t>
             </a:fld>
@@ -3783,7 +3783,7 @@
           <a:bodyPr/>
           <a:lstStyle/>
           <a:p>
-            <a:fld id="{1A780CAF-E73F-4258-8641-7FF9782BDCFB}" type="slidenum">
+            <a:fld id="{0DB572F8-9DAC-4B7A-A8F4-418922B043CC}" type="slidenum">
               <a:rPr lang="en-US"/>
               <a:t>‹#›</a:t>
             </a:fld>
@@ -3949,7 +3949,7 @@
           <a:bodyPr/>
           <a:lstStyle/>
           <a:p>
-            <a:fld id="{CB5F69C1-1B7B-4572-A580-9EC9D7EAC3C1}" type="slidenum">
+            <a:fld id="{7757227F-627B-4E62-AF0B-3BEBB24734C7}" type="slidenum">
               <a:rPr lang="en-US"/>
               <a:t>‹#›</a:t>
             </a:fld>
@@ -4115,7 +4115,7 @@
           <a:bodyPr/>
           <a:lstStyle/>
           <a:p>
-            <a:fld id="{80C7A1A6-C190-4F5F-BC4B-D200E13EDE60}" type="slidenum">
+            <a:fld id="{F4BB8BED-D87F-4F64-BA57-263EF3767A42}" type="slidenum">
               <a:rPr lang="en-US"/>
               <a:t>‹#›</a:t>
             </a:fld>
@@ -4281,7 +4281,7 @@
           <a:bodyPr/>
           <a:lstStyle/>
           <a:p>
-            <a:fld id="{32041759-E6AB-4560-8886-1D287539FAB6}" type="slidenum">
+            <a:fld id="{CB18C648-11CC-402F-8A86-8406B09EFDB9}" type="slidenum">
               <a:rPr lang="en-US"/>
               <a:t>‹#›</a:t>
             </a:fld>
@@ -4447,7 +4447,7 @@
           <a:bodyPr/>
           <a:lstStyle/>
           <a:p>
-            <a:fld id="{5DC136CC-6815-48F5-A8F4-B9AC541A1ED8}" type="slidenum">
+            <a:fld id="{D520D9D3-D96C-4502-BED6-9D65B9B30D52}" type="slidenum">
               <a:rPr lang="en-US"/>
               <a:t>‹#›</a:t>
             </a:fld>
